--- a/presentation-BERS.pptx
+++ b/presentation-BERS.pptx
@@ -7380,7 +7380,7 @@
                 <a:ea typeface="Microsoft JhengHei"/>
                 <a:cs typeface="Inter"/>
               </a:rPr>
-              <a:t>納入評估的六項耗能</a:t>
+              <a:t>住宅大樓的六項耗能</a:t>
             </a:r>
           </a:p>
         </p:txBody>
@@ -7421,7 +7421,7 @@
                 <a:ea typeface="Microsoft JhengHei"/>
                 <a:cs typeface="Inter"/>
               </a:rPr>
-              <a:t>BERS 以「能效計算邊界（ECB）」界定納入評估的耗能項目，逐一檢視如下六項。</a:t>
+              <a:t>BERS 以「能效計算邊界（ECB）」界定納入計算的耗能設備。集合住宅公共電費中，電梯與揚水泵合計超過一半。</a:t>
             </a:r>
           </a:p>
         </p:txBody>
@@ -7593,7 +7593,7 @@
                 <a:ea typeface="Microsoft JhengHei"/>
                 <a:cs typeface="Inter"/>
               </a:rPr>
-              <a:t>隔熱、遮陽、開窗</a:t>
+              <a:t>Uaw / Uar / ENVLOAD 指標</a:t>
             </a:r>
           </a:p>
         </p:txBody>
@@ -7765,7 +7765,7 @@
                 <a:ea typeface="Microsoft JhengHei"/>
                 <a:cs typeface="Inter"/>
               </a:rPr>
-              <a:t>主機效率、變頻</a:t>
+              <a:t>COP / IPLV 評估主機效率</a:t>
             </a:r>
           </a:p>
         </p:txBody>
@@ -7937,7 +7937,7 @@
                 <a:ea typeface="Microsoft JhengHei"/>
                 <a:cs typeface="Inter"/>
               </a:rPr>
-              <a:t>LED、智慧控制</a:t>
+              <a:t>LPD（W/m²）公共空間功率密度</a:t>
             </a:r>
           </a:p>
         </p:txBody>
@@ -8109,7 +8109,7 @@
                 <a:ea typeface="Microsoft JhengHei"/>
                 <a:cs typeface="Inter"/>
               </a:rPr>
-              <a:t>馬達效率、群控調度</a:t>
+              <a:t>公電 33%，最大宗</a:t>
             </a:r>
           </a:p>
         </p:txBody>
@@ -8281,7 +8281,7 @@
                 <a:ea typeface="Microsoft JhengHei"/>
                 <a:cs typeface="Inter"/>
               </a:rPr>
-              <a:t>給水加壓、屋頂水箱</a:t>
+              <a:t>公電 23%，全天候運轉</a:t>
             </a:r>
           </a:p>
         </p:txBody>
@@ -8453,7 +8453,48 @@
                 <a:ea typeface="Microsoft JhengHei"/>
                 <a:cs typeface="Inter"/>
               </a:rPr>
-              <a:t>通風、熱水等公共機電</a:t>
+              <a:t>通風 16%、照明 15%、空調 13%</a:t>
+            </a:r>
+          </a:p>
+        </p:txBody>
+      </p:sp>
+      <p:sp>
+        <p:nvSpPr>
+          <p:cNvPr id="30" name="TextBox 29"/>
+          <p:cNvSpPr txBox="1"/>
+          <p:nvPr/>
+        </p:nvSpPr>
+        <p:spPr>
+          <a:xfrm>
+            <a:off x="822960" y="6126480"/>
+            <a:ext cx="10515600" cy="548640"/>
+          </a:xfrm>
+          <a:prstGeom prst="rect">
+            <a:avLst/>
+          </a:prstGeom>
+          <a:noFill/>
+        </p:spPr>
+        <p:txBody>
+          <a:bodyPr wrap="square" anchor="t" lIns="0" rIns="0" tIns="0" bIns="0">
+            <a:spAutoFit/>
+          </a:bodyPr>
+          <a:lstStyle/>
+          <a:p>
+            <a:pPr algn="l">
+              <a:lnSpc>
+                <a:spcPct val="120000"/>
+              </a:lnSpc>
+            </a:pPr>
+            <a:r>
+              <a:rPr sz="1050" b="0" i="0">
+                <a:solidFill>
+                  <a:srgbClr val="A8A29E"/>
+                </a:solidFill>
+                <a:latin typeface="Inter"/>
+                <a:ea typeface="Microsoft JhengHei"/>
+                <a:cs typeface="Inter"/>
+              </a:rPr>
+              <a:t>公電比例來源：RP-BERSn 51 棟集合住宅案例統計（內政部建築研究所）</a:t>
             </a:r>
           </a:p>
         </p:txBody>
@@ -8747,7 +8788,7 @@
         <p:spPr>
           <a:xfrm>
             <a:off x="3657600" y="1600200"/>
-            <a:ext cx="7589520" cy="365760"/>
+            <a:ext cx="7589520" cy="384048"/>
           </a:xfrm>
           <a:prstGeom prst="rect">
             <a:avLst/>
@@ -8774,21 +8815,108 @@
                 <a:ea typeface="Microsoft JhengHei"/>
                 <a:cs typeface="Inter"/>
               </a:rPr>
-              <a:t>決定空調負荷的起點</a:t>
-            </a:r>
-          </a:p>
-        </p:txBody>
-      </p:sp>
-      <p:sp>
-        <p:nvSpPr>
-          <p:cNvPr id="9" name="TextBox 8"/>
-          <p:cNvSpPr txBox="1"/>
-          <p:nvPr/>
-        </p:nvSpPr>
-        <p:spPr>
-          <a:xfrm>
-            <a:off x="3657600" y="2103120"/>
-            <a:ext cx="7589520" cy="2103120"/>
+              <a:t>影響空調耗電的起點</a:t>
+            </a:r>
+          </a:p>
+        </p:txBody>
+      </p:sp>
+      <p:sp>
+        <p:nvSpPr>
+          <p:cNvPr id="9" name="Rectangle 8"/>
+          <p:cNvSpPr/>
+          <p:nvPr/>
+        </p:nvSpPr>
+        <p:spPr>
+          <a:xfrm>
+            <a:off x="3657600" y="2039112"/>
+            <a:ext cx="7589520" cy="329184"/>
+          </a:xfrm>
+          <a:prstGeom prst="rect">
+            <a:avLst/>
+          </a:prstGeom>
+          <a:solidFill>
+            <a:srgbClr val="FEF3C7"/>
+          </a:solidFill>
+          <a:ln w="9525">
+            <a:solidFill>
+              <a:srgbClr val="E7E5E4"/>
+            </a:solidFill>
+          </a:ln>
+          <a:effectLst/>
+        </p:spPr>
+        <p:style>
+          <a:lnRef idx="1">
+            <a:schemeClr val="accent1"/>
+          </a:lnRef>
+          <a:fillRef idx="3">
+            <a:schemeClr val="accent1"/>
+          </a:fillRef>
+          <a:effectRef idx="2">
+            <a:schemeClr val="accent1"/>
+          </a:effectRef>
+          <a:fontRef idx="minor">
+            <a:schemeClr val="lt1"/>
+          </a:fontRef>
+        </p:style>
+        <p:txBody>
+          <a:bodyPr rtlCol="0" anchor="ctr"/>
+          <a:lstStyle/>
+          <a:p>
+            <a:pPr algn="ctr"/>
+          </a:p>
+        </p:txBody>
+      </p:sp>
+      <p:sp>
+        <p:nvSpPr>
+          <p:cNvPr id="10" name="TextBox 9"/>
+          <p:cNvSpPr txBox="1"/>
+          <p:nvPr/>
+        </p:nvSpPr>
+        <p:spPr>
+          <a:xfrm>
+            <a:off x="3767328" y="2075688"/>
+            <a:ext cx="7406640" cy="292608"/>
+          </a:xfrm>
+          <a:prstGeom prst="rect">
+            <a:avLst/>
+          </a:prstGeom>
+          <a:noFill/>
+        </p:spPr>
+        <p:txBody>
+          <a:bodyPr wrap="square" anchor="t" lIns="0" rIns="0" tIns="0" bIns="0">
+            <a:spAutoFit/>
+          </a:bodyPr>
+          <a:lstStyle/>
+          <a:p>
+            <a:pPr algn="l">
+              <a:lnSpc>
+                <a:spcPct val="100000"/>
+              </a:lnSpc>
+            </a:pPr>
+            <a:r>
+              <a:rPr sz="850" b="0" i="0">
+                <a:solidFill>
+                  <a:srgbClr val="B45309"/>
+                </a:solidFill>
+                <a:latin typeface="Consolas"/>
+                <a:ea typeface="Microsoft JhengHei"/>
+                <a:cs typeface="Consolas"/>
+              </a:rPr>
+              <a:t>ENVLOAD = Σ(牆面積 × Uaw × 溫差 + 窗面積 × SC × 日射) ÷ 樓地板面積</a:t>
+            </a:r>
+          </a:p>
+        </p:txBody>
+      </p:sp>
+      <p:sp>
+        <p:nvSpPr>
+          <p:cNvPr id="11" name="TextBox 10"/>
+          <p:cNvSpPr txBox="1"/>
+          <p:nvPr/>
+        </p:nvSpPr>
+        <p:spPr>
+          <a:xfrm>
+            <a:off x="3657600" y="2441448"/>
+            <a:ext cx="7589520" cy="2286000"/>
           </a:xfrm>
           <a:prstGeom prst="rect">
             <a:avLst/>
@@ -8803,14 +8931,14 @@
           <a:p>
             <a:pPr>
               <a:lnSpc>
-                <a:spcPct val="118000"/>
+                <a:spcPct val="115000"/>
               </a:lnSpc>
               <a:spcAft>
-                <a:spcPts val="500"/>
+                <a:spcPts val="400"/>
               </a:spcAft>
             </a:pPr>
             <a:r>
-              <a:rPr sz="1250" b="0" i="0">
+              <a:rPr sz="1150" b="0" i="0">
                 <a:solidFill>
                   <a:srgbClr val="B45309"/>
                 </a:solidFill>
@@ -8821,7 +8949,7 @@
               <a:t>•  </a:t>
             </a:r>
             <a:r>
-              <a:rPr sz="1250" b="0" i="0">
+              <a:rPr sz="1150" b="0" i="0">
                 <a:solidFill>
                   <a:srgbClr val="44403C"/>
                 </a:solidFill>
@@ -8829,20 +8957,20 @@
                 <a:ea typeface="Microsoft JhengHei"/>
                 <a:cs typeface="Inter"/>
               </a:rPr>
-              <a:t>外牆與屋頂的隔熱性能</a:t>
+              <a:t>手冊以外牆熱傳透率 Uaw（W/m²·K）與屋頂 Uar 為核心參數；台灣住宅外牆規範基準 ≤ 2.0 W/m²·K，高效設計可達 1.2 以下</a:t>
             </a:r>
           </a:p>
           <a:p>
             <a:pPr>
               <a:lnSpc>
-                <a:spcPct val="118000"/>
+                <a:spcPct val="115000"/>
               </a:lnSpc>
               <a:spcAft>
-                <a:spcPts val="500"/>
+                <a:spcPts val="400"/>
               </a:spcAft>
             </a:pPr>
             <a:r>
-              <a:rPr sz="1250" b="0" i="0">
+              <a:rPr sz="1150" b="0" i="0">
                 <a:solidFill>
                   <a:srgbClr val="B45309"/>
                 </a:solidFill>
@@ -8853,7 +8981,7 @@
               <a:t>•  </a:t>
             </a:r>
             <a:r>
-              <a:rPr sz="1250" b="0" i="0">
+              <a:rPr sz="1150" b="0" i="0">
                 <a:solidFill>
                   <a:srgbClr val="44403C"/>
                 </a:solidFill>
@@ -8861,20 +8989,20 @@
                 <a:ea typeface="Microsoft JhengHei"/>
                 <a:cs typeface="Inter"/>
               </a:rPr>
-              <a:t>開窗面積、玻璃選用與外遮陽</a:t>
+              <a:t>西向立面以外遮陽搭配 Low-E 玻璃，遮陽係數（SC）從 0.87 降至 0.35，夏季空調負載可降約 20%</a:t>
             </a:r>
           </a:p>
           <a:p>
             <a:pPr>
               <a:lnSpc>
-                <a:spcPct val="118000"/>
+                <a:spcPct val="115000"/>
               </a:lnSpc>
               <a:spcAft>
-                <a:spcPts val="500"/>
+                <a:spcPts val="400"/>
               </a:spcAft>
             </a:pPr>
             <a:r>
-              <a:rPr sz="1250" b="0" i="0">
+              <a:rPr sz="1150" b="0" i="0">
                 <a:solidFill>
                   <a:srgbClr val="B45309"/>
                 </a:solidFill>
@@ -8885,7 +9013,7 @@
               <a:t>•  </a:t>
             </a:r>
             <a:r>
-              <a:rPr sz="1250" b="0" i="0">
+              <a:rPr sz="1150" b="0" i="0">
                 <a:solidFill>
                   <a:srgbClr val="44403C"/>
                 </a:solidFill>
@@ -8893,21 +9021,21 @@
                 <a:ea typeface="Microsoft JhengHei"/>
                 <a:cs typeface="Inter"/>
               </a:rPr>
-              <a:t>朝向配置與開窗位置的優化</a:t>
-            </a:r>
-          </a:p>
-        </p:txBody>
-      </p:sp>
-      <p:sp>
-        <p:nvSpPr>
-          <p:cNvPr id="10" name="Rectangle 9"/>
+              <a:t>外殼是唯一在圖面定案後就幾乎無法再改的設計 —— 選材早、選對了，空調裝多大都還有彈性</a:t>
+            </a:r>
+          </a:p>
+        </p:txBody>
+      </p:sp>
+      <p:sp>
+        <p:nvSpPr>
+          <p:cNvPr id="12" name="Rectangle 11"/>
           <p:cNvSpPr/>
           <p:nvPr/>
         </p:nvSpPr>
         <p:spPr>
           <a:xfrm>
-            <a:off x="3657600" y="3538728"/>
-            <a:ext cx="25400" cy="868680"/>
+            <a:off x="3657600" y="3685032"/>
+            <a:ext cx="25400" cy="822960"/>
           </a:xfrm>
           <a:prstGeom prst="rect">
             <a:avLst/>
@@ -8944,14 +9072,14 @@
       </p:sp>
       <p:sp>
         <p:nvSpPr>
-          <p:cNvPr id="11" name="TextBox 10"/>
-          <p:cNvSpPr txBox="1"/>
-          <p:nvPr/>
-        </p:nvSpPr>
-        <p:spPr>
-          <a:xfrm>
-            <a:off x="3840480" y="3538728"/>
-            <a:ext cx="7223760" cy="914400"/>
+          <p:cNvPr id="13" name="TextBox 12"/>
+          <p:cNvSpPr txBox="1"/>
+          <p:nvPr/>
+        </p:nvSpPr>
+        <p:spPr>
+          <a:xfrm>
+            <a:off x="3840480" y="3685032"/>
+            <a:ext cx="7223760" cy="868680"/>
           </a:xfrm>
           <a:prstGeom prst="rect">
             <a:avLst/>
@@ -8970,7 +9098,7 @@
               </a:lnSpc>
             </a:pPr>
             <a:r>
-              <a:rPr sz="1200" b="0" i="1">
+              <a:rPr sz="1150" b="0" i="1">
                 <a:solidFill>
                   <a:srgbClr val="B45309"/>
                 </a:solidFill>
@@ -8978,7 +9106,7 @@
                 <a:ea typeface="Microsoft JhengHei"/>
                 <a:cs typeface="Inter"/>
               </a:rPr>
-              <a:t>外殼做得好，後面的空調可以用更小的容量，達到一樣的舒適。</a:t>
+              <a:t>外殼做得好，後面的空調可以小一號，設備費省了，長期電費也省了。</a:t>
             </a:r>
           </a:p>
         </p:txBody>
@@ -9272,7 +9400,7 @@
         <p:spPr>
           <a:xfrm>
             <a:off x="3657600" y="1600200"/>
-            <a:ext cx="7589520" cy="365760"/>
+            <a:ext cx="7589520" cy="384048"/>
           </a:xfrm>
           <a:prstGeom prst="rect">
             <a:avLst/>
@@ -9299,21 +9427,108 @@
                 <a:ea typeface="Microsoft JhengHei"/>
                 <a:cs typeface="Inter"/>
               </a:rPr>
-              <a:t>通常是最大宗的用電負載</a:t>
-            </a:r>
-          </a:p>
-        </p:txBody>
-      </p:sp>
-      <p:sp>
-        <p:nvSpPr>
-          <p:cNvPr id="9" name="TextBox 8"/>
-          <p:cNvSpPr txBox="1"/>
-          <p:nvPr/>
-        </p:nvSpPr>
-        <p:spPr>
-          <a:xfrm>
-            <a:off x="3657600" y="2103120"/>
-            <a:ext cx="7589520" cy="2103120"/>
+              <a:t>住戶私用電的最大一塊</a:t>
+            </a:r>
+          </a:p>
+        </p:txBody>
+      </p:sp>
+      <p:sp>
+        <p:nvSpPr>
+          <p:cNvPr id="9" name="Rectangle 8"/>
+          <p:cNvSpPr/>
+          <p:nvPr/>
+        </p:nvSpPr>
+        <p:spPr>
+          <a:xfrm>
+            <a:off x="3657600" y="2039112"/>
+            <a:ext cx="7589520" cy="329184"/>
+          </a:xfrm>
+          <a:prstGeom prst="rect">
+            <a:avLst/>
+          </a:prstGeom>
+          <a:solidFill>
+            <a:srgbClr val="FEF3C7"/>
+          </a:solidFill>
+          <a:ln w="9525">
+            <a:solidFill>
+              <a:srgbClr val="E7E5E4"/>
+            </a:solidFill>
+          </a:ln>
+          <a:effectLst/>
+        </p:spPr>
+        <p:style>
+          <a:lnRef idx="1">
+            <a:schemeClr val="accent1"/>
+          </a:lnRef>
+          <a:fillRef idx="3">
+            <a:schemeClr val="accent1"/>
+          </a:fillRef>
+          <a:effectRef idx="2">
+            <a:schemeClr val="accent1"/>
+          </a:effectRef>
+          <a:fontRef idx="minor">
+            <a:schemeClr val="lt1"/>
+          </a:fontRef>
+        </p:style>
+        <p:txBody>
+          <a:bodyPr rtlCol="0" anchor="ctr"/>
+          <a:lstStyle/>
+          <a:p>
+            <a:pPr algn="ctr"/>
+          </a:p>
+        </p:txBody>
+      </p:sp>
+      <p:sp>
+        <p:nvSpPr>
+          <p:cNvPr id="10" name="TextBox 9"/>
+          <p:cNvSpPr txBox="1"/>
+          <p:nvPr/>
+        </p:nvSpPr>
+        <p:spPr>
+          <a:xfrm>
+            <a:off x="3767328" y="2075688"/>
+            <a:ext cx="7406640" cy="292608"/>
+          </a:xfrm>
+          <a:prstGeom prst="rect">
+            <a:avLst/>
+          </a:prstGeom>
+          <a:noFill/>
+        </p:spPr>
+        <p:txBody>
+          <a:bodyPr wrap="square" anchor="t" lIns="0" rIns="0" tIns="0" bIns="0">
+            <a:spAutoFit/>
+          </a:bodyPr>
+          <a:lstStyle/>
+          <a:p>
+            <a:pPr algn="l">
+              <a:lnSpc>
+                <a:spcPct val="100000"/>
+              </a:lnSpc>
+            </a:pPr>
+            <a:r>
+              <a:rPr sz="850" b="0" i="0">
+                <a:solidFill>
+                  <a:srgbClr val="B45309"/>
+                </a:solidFill>
+                <a:latin typeface="Consolas"/>
+                <a:ea typeface="Microsoft JhengHei"/>
+                <a:cs typeface="Consolas"/>
+              </a:rPr>
+              <a:t>COP = 製冷量 (kW) ÷ 輸入功率 (kW)   |   空調耗電 = 製冷量 × 時數 ÷ COP</a:t>
+            </a:r>
+          </a:p>
+        </p:txBody>
+      </p:sp>
+      <p:sp>
+        <p:nvSpPr>
+          <p:cNvPr id="11" name="TextBox 10"/>
+          <p:cNvSpPr txBox="1"/>
+          <p:nvPr/>
+        </p:nvSpPr>
+        <p:spPr>
+          <a:xfrm>
+            <a:off x="3657600" y="2441448"/>
+            <a:ext cx="7589520" cy="2286000"/>
           </a:xfrm>
           <a:prstGeom prst="rect">
             <a:avLst/>
@@ -9328,14 +9543,14 @@
           <a:p>
             <a:pPr>
               <a:lnSpc>
-                <a:spcPct val="118000"/>
+                <a:spcPct val="115000"/>
               </a:lnSpc>
               <a:spcAft>
-                <a:spcPts val="500"/>
+                <a:spcPts val="400"/>
               </a:spcAft>
             </a:pPr>
             <a:r>
-              <a:rPr sz="1250" b="0" i="0">
+              <a:rPr sz="1150" b="0" i="0">
                 <a:solidFill>
                   <a:srgbClr val="B45309"/>
                 </a:solidFill>
@@ -9346,7 +9561,7 @@
               <a:t>•  </a:t>
             </a:r>
             <a:r>
-              <a:rPr sz="1250" b="0" i="0">
+              <a:rPr sz="1150" b="0" i="0">
                 <a:solidFill>
                   <a:srgbClr val="44403C"/>
                 </a:solidFill>
@@ -9354,20 +9569,20 @@
                 <a:ea typeface="Microsoft JhengHei"/>
                 <a:cs typeface="Inter"/>
               </a:rPr>
-              <a:t>主機效率（COP／IPLV）</a:t>
+              <a:t>家用分離式空調台灣 1 級能效 EER ≥ 4.26，比市場普通品省電 30% 以上；R-BERSn 評估時直接採用設備 EER 計算戶內空調耗電</a:t>
             </a:r>
           </a:p>
           <a:p>
             <a:pPr>
               <a:lnSpc>
-                <a:spcPct val="118000"/>
+                <a:spcPct val="115000"/>
               </a:lnSpc>
               <a:spcAft>
-                <a:spcPts val="500"/>
+                <a:spcPts val="400"/>
               </a:spcAft>
             </a:pPr>
             <a:r>
-              <a:rPr sz="1250" b="0" i="0">
+              <a:rPr sz="1150" b="0" i="0">
                 <a:solidFill>
                   <a:srgbClr val="B45309"/>
                 </a:solidFill>
@@ -9378,7 +9593,7 @@
               <a:t>•  </a:t>
             </a:r>
             <a:r>
-              <a:rPr sz="1250" b="0" i="0">
+              <a:rPr sz="1150" b="0" i="0">
                 <a:solidFill>
                   <a:srgbClr val="44403C"/>
                 </a:solidFill>
@@ -9386,20 +9601,20 @@
                 <a:ea typeface="Microsoft JhengHei"/>
                 <a:cs typeface="Inter"/>
               </a:rPr>
-              <a:t>變頻控制與分區送風</a:t>
+              <a:t>IPLV 是四個部分負載點加權效率（1%@100%、42%@75%、45%@50%、12%@25%），反映長時間中低負載的真實耗電</a:t>
             </a:r>
           </a:p>
           <a:p>
             <a:pPr>
               <a:lnSpc>
-                <a:spcPct val="118000"/>
+                <a:spcPct val="115000"/>
               </a:lnSpc>
               <a:spcAft>
-                <a:spcPts val="500"/>
+                <a:spcPts val="400"/>
               </a:spcAft>
             </a:pPr>
             <a:r>
-              <a:rPr sz="1250" b="0" i="0">
+              <a:rPr sz="1150" b="0" i="0">
                 <a:solidFill>
                   <a:srgbClr val="B45309"/>
                 </a:solidFill>
@@ -9410,7 +9625,7 @@
               <a:t>•  </a:t>
             </a:r>
             <a:r>
-              <a:rPr sz="1250" b="0" i="0">
+              <a:rPr sz="1150" b="0" i="0">
                 <a:solidFill>
                   <a:srgbClr val="44403C"/>
                 </a:solidFill>
@@ -9418,21 +9633,21 @@
                 <a:ea typeface="Microsoft JhengHei"/>
                 <a:cs typeface="Inter"/>
               </a:rPr>
-              <a:t>新風與熱回收設計</a:t>
-            </a:r>
-          </a:p>
-        </p:txBody>
-      </p:sp>
-      <p:sp>
-        <p:nvSpPr>
-          <p:cNvPr id="10" name="Rectangle 9"/>
+              <a:t>公共大廳若設中央空調，水冷螺旋主機 COP 應達 4.5 以上；全變頻機種在非尖峰時段效益尤其明顯</a:t>
+            </a:r>
+          </a:p>
+        </p:txBody>
+      </p:sp>
+      <p:sp>
+        <p:nvSpPr>
+          <p:cNvPr id="12" name="Rectangle 11"/>
           <p:cNvSpPr/>
           <p:nvPr/>
         </p:nvSpPr>
         <p:spPr>
           <a:xfrm>
-            <a:off x="3657600" y="3538728"/>
-            <a:ext cx="25400" cy="868680"/>
+            <a:off x="3657600" y="3685032"/>
+            <a:ext cx="25400" cy="822960"/>
           </a:xfrm>
           <a:prstGeom prst="rect">
             <a:avLst/>
@@ -9469,14 +9684,14 @@
       </p:sp>
       <p:sp>
         <p:nvSpPr>
-          <p:cNvPr id="11" name="TextBox 10"/>
-          <p:cNvSpPr txBox="1"/>
-          <p:nvPr/>
-        </p:nvSpPr>
-        <p:spPr>
-          <a:xfrm>
-            <a:off x="3840480" y="3538728"/>
-            <a:ext cx="7223760" cy="914400"/>
+          <p:cNvPr id="13" name="TextBox 12"/>
+          <p:cNvSpPr txBox="1"/>
+          <p:nvPr/>
+        </p:nvSpPr>
+        <p:spPr>
+          <a:xfrm>
+            <a:off x="3840480" y="3685032"/>
+            <a:ext cx="7223760" cy="868680"/>
           </a:xfrm>
           <a:prstGeom prst="rect">
             <a:avLst/>
@@ -9495,7 +9710,7 @@
               </a:lnSpc>
             </a:pPr>
             <a:r>
-              <a:rPr sz="1200" b="0" i="1">
+              <a:rPr sz="1150" b="0" i="1">
                 <a:solidFill>
                   <a:srgbClr val="B45309"/>
                 </a:solidFill>
@@ -9503,7 +9718,7 @@
                 <a:ea typeface="Microsoft JhengHei"/>
                 <a:cs typeface="Inter"/>
               </a:rPr>
-              <a:t>主機效率提高一級，長期電費單上的差異就很可觀。</a:t>
+              <a:t>最省電的空調，是不需要開那麼久的空調 —— 外殼擋了熱，COP 就算普通也夠用了。</a:t>
             </a:r>
           </a:p>
         </p:txBody>
@@ -9797,7 +10012,7 @@
         <p:spPr>
           <a:xfrm>
             <a:off x="3657600" y="1600200"/>
-            <a:ext cx="7589520" cy="365760"/>
+            <a:ext cx="7589520" cy="384048"/>
           </a:xfrm>
           <a:prstGeom prst="rect">
             <a:avLst/>
@@ -9824,21 +10039,108 @@
                 <a:ea typeface="Microsoft JhengHei"/>
                 <a:cs typeface="Inter"/>
               </a:rPr>
-              <a:t>長時間運轉的固定負載</a:t>
-            </a:r>
-          </a:p>
-        </p:txBody>
-      </p:sp>
-      <p:sp>
-        <p:nvSpPr>
-          <p:cNvPr id="9" name="TextBox 8"/>
-          <p:cNvSpPr txBox="1"/>
-          <p:nvPr/>
-        </p:nvSpPr>
-        <p:spPr>
-          <a:xfrm>
-            <a:off x="3657600" y="2103120"/>
-            <a:ext cx="7589520" cy="2103120"/>
+              <a:t>公電的 15%，靠感應控制最有效</a:t>
+            </a:r>
+          </a:p>
+        </p:txBody>
+      </p:sp>
+      <p:sp>
+        <p:nvSpPr>
+          <p:cNvPr id="9" name="Rectangle 8"/>
+          <p:cNvSpPr/>
+          <p:nvPr/>
+        </p:nvSpPr>
+        <p:spPr>
+          <a:xfrm>
+            <a:off x="3657600" y="2039112"/>
+            <a:ext cx="7589520" cy="329184"/>
+          </a:xfrm>
+          <a:prstGeom prst="rect">
+            <a:avLst/>
+          </a:prstGeom>
+          <a:solidFill>
+            <a:srgbClr val="FEF3C7"/>
+          </a:solidFill>
+          <a:ln w="9525">
+            <a:solidFill>
+              <a:srgbClr val="E7E5E4"/>
+            </a:solidFill>
+          </a:ln>
+          <a:effectLst/>
+        </p:spPr>
+        <p:style>
+          <a:lnRef idx="1">
+            <a:schemeClr val="accent1"/>
+          </a:lnRef>
+          <a:fillRef idx="3">
+            <a:schemeClr val="accent1"/>
+          </a:fillRef>
+          <a:effectRef idx="2">
+            <a:schemeClr val="accent1"/>
+          </a:effectRef>
+          <a:fontRef idx="minor">
+            <a:schemeClr val="lt1"/>
+          </a:fontRef>
+        </p:style>
+        <p:txBody>
+          <a:bodyPr rtlCol="0" anchor="ctr"/>
+          <a:lstStyle/>
+          <a:p>
+            <a:pPr algn="ctr"/>
+          </a:p>
+        </p:txBody>
+      </p:sp>
+      <p:sp>
+        <p:nvSpPr>
+          <p:cNvPr id="10" name="TextBox 9"/>
+          <p:cNvSpPr txBox="1"/>
+          <p:nvPr/>
+        </p:nvSpPr>
+        <p:spPr>
+          <a:xfrm>
+            <a:off x="3767328" y="2075688"/>
+            <a:ext cx="7406640" cy="292608"/>
+          </a:xfrm>
+          <a:prstGeom prst="rect">
+            <a:avLst/>
+          </a:prstGeom>
+          <a:noFill/>
+        </p:spPr>
+        <p:txBody>
+          <a:bodyPr wrap="square" anchor="t" lIns="0" rIns="0" tIns="0" bIns="0">
+            <a:spAutoFit/>
+          </a:bodyPr>
+          <a:lstStyle/>
+          <a:p>
+            <a:pPr algn="l">
+              <a:lnSpc>
+                <a:spcPct val="100000"/>
+              </a:lnSpc>
+            </a:pPr>
+            <a:r>
+              <a:rPr sz="850" b="0" i="0">
+                <a:solidFill>
+                  <a:srgbClr val="B45309"/>
+                </a:solidFill>
+                <a:latin typeface="Consolas"/>
+                <a:ea typeface="Microsoft JhengHei"/>
+                <a:cs typeface="Consolas"/>
+              </a:rPr>
+              <a:t>LPD (W/m²) = 燈具總功率 ÷ 空間面積   |   EL = 設計 LPD ÷ 基準 LPD</a:t>
+            </a:r>
+          </a:p>
+        </p:txBody>
+      </p:sp>
+      <p:sp>
+        <p:nvSpPr>
+          <p:cNvPr id="11" name="TextBox 10"/>
+          <p:cNvSpPr txBox="1"/>
+          <p:nvPr/>
+        </p:nvSpPr>
+        <p:spPr>
+          <a:xfrm>
+            <a:off x="3657600" y="2441448"/>
+            <a:ext cx="7589520" cy="2286000"/>
           </a:xfrm>
           <a:prstGeom prst="rect">
             <a:avLst/>
@@ -9853,14 +10155,14 @@
           <a:p>
             <a:pPr>
               <a:lnSpc>
-                <a:spcPct val="118000"/>
+                <a:spcPct val="115000"/>
               </a:lnSpc>
               <a:spcAft>
-                <a:spcPts val="500"/>
+                <a:spcPts val="400"/>
               </a:spcAft>
             </a:pPr>
             <a:r>
-              <a:rPr sz="1250" b="0" i="0">
+              <a:rPr sz="1150" b="0" i="0">
                 <a:solidFill>
                   <a:srgbClr val="B45309"/>
                 </a:solidFill>
@@ -9871,7 +10173,7 @@
               <a:t>•  </a:t>
             </a:r>
             <a:r>
-              <a:rPr sz="1250" b="0" i="0">
+              <a:rPr sz="1150" b="0" i="0">
                 <a:solidFill>
                   <a:srgbClr val="44403C"/>
                 </a:solidFill>
@@ -9879,20 +10181,20 @@
                 <a:ea typeface="Microsoft JhengHei"/>
                 <a:cs typeface="Inter"/>
               </a:rPr>
-              <a:t>燈具發光效率（lm／W）</a:t>
+              <a:t>手冊以照明功率密度 LPD（W/m²）評估；地下停車場基準約 5 W/m²，改 LED 後實際值可壓到 3 W/m² 以下</a:t>
             </a:r>
           </a:p>
           <a:p>
             <a:pPr>
               <a:lnSpc>
-                <a:spcPct val="118000"/>
+                <a:spcPct val="115000"/>
               </a:lnSpc>
               <a:spcAft>
-                <a:spcPts val="500"/>
+                <a:spcPts val="400"/>
               </a:spcAft>
             </a:pPr>
             <a:r>
-              <a:rPr sz="1250" b="0" i="0">
+              <a:rPr sz="1150" b="0" i="0">
                 <a:solidFill>
                   <a:srgbClr val="B45309"/>
                 </a:solidFill>
@@ -9903,7 +10205,7 @@
               <a:t>•  </a:t>
             </a:r>
             <a:r>
-              <a:rPr sz="1250" b="0" i="0">
+              <a:rPr sz="1150" b="0" i="0">
                 <a:solidFill>
                   <a:srgbClr val="44403C"/>
                 </a:solidFill>
@@ -9911,20 +10213,20 @@
                 <a:ea typeface="Microsoft JhengHei"/>
                 <a:cs typeface="Inter"/>
               </a:rPr>
-              <a:t>公共空間的分區與時段控制</a:t>
+              <a:t>走廊、電梯廳加裝動作感應器，可讓非尖峰時段燈具從 100% 降至 30% 待機亮度，全年節電 40–60%</a:t>
             </a:r>
           </a:p>
           <a:p>
             <a:pPr>
               <a:lnSpc>
-                <a:spcPct val="118000"/>
+                <a:spcPct val="115000"/>
               </a:lnSpc>
               <a:spcAft>
-                <a:spcPts val="500"/>
+                <a:spcPts val="400"/>
               </a:spcAft>
             </a:pPr>
             <a:r>
-              <a:rPr sz="1250" b="0" i="0">
+              <a:rPr sz="1150" b="0" i="0">
                 <a:solidFill>
                   <a:srgbClr val="B45309"/>
                 </a:solidFill>
@@ -9935,7 +10237,7 @@
               <a:t>•  </a:t>
             </a:r>
             <a:r>
-              <a:rPr sz="1250" b="0" i="0">
+              <a:rPr sz="1150" b="0" i="0">
                 <a:solidFill>
                   <a:srgbClr val="44403C"/>
                 </a:solidFill>
@@ -9943,21 +10245,21 @@
                 <a:ea typeface="Microsoft JhengHei"/>
                 <a:cs typeface="Inter"/>
               </a:rPr>
-              <a:t>自然採光與感應控制整合</a:t>
-            </a:r>
-          </a:p>
-        </p:txBody>
-      </p:sp>
-      <p:sp>
-        <p:nvSpPr>
-          <p:cNvPr id="10" name="Rectangle 9"/>
+              <a:t>地下停車場常與通風設備共用 CO 感應邏輯，人少時燈光與風機同步降載，兩個費用一起省</a:t>
+            </a:r>
+          </a:p>
+        </p:txBody>
+      </p:sp>
+      <p:sp>
+        <p:nvSpPr>
+          <p:cNvPr id="12" name="Rectangle 11"/>
           <p:cNvSpPr/>
           <p:nvPr/>
         </p:nvSpPr>
         <p:spPr>
           <a:xfrm>
-            <a:off x="3657600" y="3538728"/>
-            <a:ext cx="25400" cy="868680"/>
+            <a:off x="3657600" y="3685032"/>
+            <a:ext cx="25400" cy="822960"/>
           </a:xfrm>
           <a:prstGeom prst="rect">
             <a:avLst/>
@@ -9994,14 +10296,14 @@
       </p:sp>
       <p:sp>
         <p:nvSpPr>
-          <p:cNvPr id="11" name="TextBox 10"/>
-          <p:cNvSpPr txBox="1"/>
-          <p:nvPr/>
-        </p:nvSpPr>
-        <p:spPr>
-          <a:xfrm>
-            <a:off x="3840480" y="3538728"/>
-            <a:ext cx="7223760" cy="914400"/>
+          <p:cNvPr id="13" name="TextBox 12"/>
+          <p:cNvSpPr txBox="1"/>
+          <p:nvPr/>
+        </p:nvSpPr>
+        <p:spPr>
+          <a:xfrm>
+            <a:off x="3840480" y="3685032"/>
+            <a:ext cx="7223760" cy="868680"/>
           </a:xfrm>
           <a:prstGeom prst="rect">
             <a:avLst/>
@@ -10020,7 +10322,7 @@
               </a:lnSpc>
             </a:pPr>
             <a:r>
-              <a:rPr sz="1200" b="0" i="1">
+              <a:rPr sz="1150" b="0" i="1">
                 <a:solidFill>
                   <a:srgbClr val="B45309"/>
                 </a:solidFill>
@@ -10028,7 +10330,7 @@
                 <a:ea typeface="Microsoft JhengHei"/>
                 <a:cs typeface="Inter"/>
               </a:rPr>
-              <a:t>走廊、停車場的燈一開就是一整天 —— 效率差一點，全年下來都是電費。</a:t>
+              <a:t>地下停車場的燈，換 LED 加感應器，管委會下一個十年的電費差距就出來了。</a:t>
             </a:r>
           </a:p>
         </p:txBody>
@@ -11326,7 +11628,7 @@
         <p:spPr>
           <a:xfrm>
             <a:off x="3657600" y="1600200"/>
-            <a:ext cx="7589520" cy="365760"/>
+            <a:ext cx="7589520" cy="384048"/>
           </a:xfrm>
           <a:prstGeom prst="rect">
             <a:avLst/>
@@ -11353,21 +11655,108 @@
                 <a:ea typeface="Microsoft JhengHei"/>
                 <a:cs typeface="Inter"/>
               </a:rPr>
-              <a:t>中高樓層住宅的公共用電大宗</a:t>
-            </a:r>
-          </a:p>
-        </p:txBody>
-      </p:sp>
-      <p:sp>
-        <p:nvSpPr>
-          <p:cNvPr id="9" name="TextBox 8"/>
-          <p:cNvSpPr txBox="1"/>
-          <p:nvPr/>
-        </p:nvSpPr>
-        <p:spPr>
-          <a:xfrm>
-            <a:off x="3657600" y="2103120"/>
-            <a:ext cx="7589520" cy="2103120"/>
+              <a:t>▶ 公電 33%  住宅大樓最大電費項</a:t>
+            </a:r>
+          </a:p>
+        </p:txBody>
+      </p:sp>
+      <p:sp>
+        <p:nvSpPr>
+          <p:cNvPr id="9" name="Rectangle 8"/>
+          <p:cNvSpPr/>
+          <p:nvPr/>
+        </p:nvSpPr>
+        <p:spPr>
+          <a:xfrm>
+            <a:off x="3657600" y="2039112"/>
+            <a:ext cx="7589520" cy="329184"/>
+          </a:xfrm>
+          <a:prstGeom prst="rect">
+            <a:avLst/>
+          </a:prstGeom>
+          <a:solidFill>
+            <a:srgbClr val="FEF3C7"/>
+          </a:solidFill>
+          <a:ln w="9525">
+            <a:solidFill>
+              <a:srgbClr val="E7E5E4"/>
+            </a:solidFill>
+          </a:ln>
+          <a:effectLst/>
+        </p:spPr>
+        <p:style>
+          <a:lnRef idx="1">
+            <a:schemeClr val="accent1"/>
+          </a:lnRef>
+          <a:fillRef idx="3">
+            <a:schemeClr val="accent1"/>
+          </a:fillRef>
+          <a:effectRef idx="2">
+            <a:schemeClr val="accent1"/>
+          </a:effectRef>
+          <a:fontRef idx="minor">
+            <a:schemeClr val="lt1"/>
+          </a:fontRef>
+        </p:style>
+        <p:txBody>
+          <a:bodyPr rtlCol="0" anchor="ctr"/>
+          <a:lstStyle/>
+          <a:p>
+            <a:pPr algn="ctr"/>
+          </a:p>
+        </p:txBody>
+      </p:sp>
+      <p:sp>
+        <p:nvSpPr>
+          <p:cNvPr id="10" name="TextBox 9"/>
+          <p:cNvSpPr txBox="1"/>
+          <p:nvPr/>
+        </p:nvSpPr>
+        <p:spPr>
+          <a:xfrm>
+            <a:off x="3767328" y="2075688"/>
+            <a:ext cx="7406640" cy="292608"/>
+          </a:xfrm>
+          <a:prstGeom prst="rect">
+            <a:avLst/>
+          </a:prstGeom>
+          <a:noFill/>
+        </p:spPr>
+        <p:txBody>
+          <a:bodyPr wrap="square" anchor="t" lIns="0" rIns="0" tIns="0" bIns="0">
+            <a:spAutoFit/>
+          </a:bodyPr>
+          <a:lstStyle/>
+          <a:p>
+            <a:pPr algn="l">
+              <a:lnSpc>
+                <a:spcPct val="100000"/>
+              </a:lnSpc>
+            </a:pPr>
+            <a:r>
+              <a:rPr sz="850" b="0" i="0">
+                <a:solidFill>
+                  <a:srgbClr val="B45309"/>
+                </a:solidFill>
+                <a:latin typeface="Consolas"/>
+                <a:ea typeface="Microsoft JhengHei"/>
+                <a:cs typeface="Consolas"/>
+              </a:rPr>
+              <a:t>年耗電 ≈ 額定功率 (kW) × 年運轉時數 × 使用率 ÷ 電機效率</a:t>
+            </a:r>
+          </a:p>
+        </p:txBody>
+      </p:sp>
+      <p:sp>
+        <p:nvSpPr>
+          <p:cNvPr id="11" name="TextBox 10"/>
+          <p:cNvSpPr txBox="1"/>
+          <p:nvPr/>
+        </p:nvSpPr>
+        <p:spPr>
+          <a:xfrm>
+            <a:off x="3657600" y="2441448"/>
+            <a:ext cx="7589520" cy="2286000"/>
           </a:xfrm>
           <a:prstGeom prst="rect">
             <a:avLst/>
@@ -11382,14 +11771,14 @@
           <a:p>
             <a:pPr>
               <a:lnSpc>
-                <a:spcPct val="118000"/>
+                <a:spcPct val="115000"/>
               </a:lnSpc>
               <a:spcAft>
-                <a:spcPts val="500"/>
+                <a:spcPts val="400"/>
               </a:spcAft>
             </a:pPr>
             <a:r>
-              <a:rPr sz="1250" b="0" i="0">
+              <a:rPr sz="1150" b="0" i="0">
                 <a:solidFill>
                   <a:srgbClr val="B45309"/>
                 </a:solidFill>
@@ -11400,7 +11789,7 @@
               <a:t>•  </a:t>
             </a:r>
             <a:r>
-              <a:rPr sz="1250" b="0" i="0">
+              <a:rPr sz="1150" b="0" i="0">
                 <a:solidFill>
                   <a:srgbClr val="44403C"/>
                 </a:solidFill>
@@ -11408,20 +11797,20 @@
                 <a:ea typeface="Microsoft JhengHei"/>
                 <a:cs typeface="Inter"/>
               </a:rPr>
-              <a:t>馬達效率與驅動方式</a:t>
+              <a:t>51 棟集合住宅統計，電梯獨占公電 33%；一棟 30 層、200 戶住宅，全年電梯用電可超過 10 萬 kWh</a:t>
             </a:r>
           </a:p>
           <a:p>
             <a:pPr>
               <a:lnSpc>
-                <a:spcPct val="118000"/>
+                <a:spcPct val="115000"/>
               </a:lnSpc>
               <a:spcAft>
-                <a:spcPts val="500"/>
+                <a:spcPts val="400"/>
               </a:spcAft>
             </a:pPr>
             <a:r>
-              <a:rPr sz="1250" b="0" i="0">
+              <a:rPr sz="1150" b="0" i="0">
                 <a:solidFill>
                   <a:srgbClr val="B45309"/>
                 </a:solidFill>
@@ -11432,7 +11821,7 @@
               <a:t>•  </a:t>
             </a:r>
             <a:r>
-              <a:rPr sz="1250" b="0" i="0">
+              <a:rPr sz="1150" b="0" i="0">
                 <a:solidFill>
                   <a:srgbClr val="44403C"/>
                 </a:solidFill>
@@ -11440,20 +11829,20 @@
                 <a:ea typeface="Microsoft JhengHei"/>
                 <a:cs typeface="Inter"/>
               </a:rPr>
-              <a:t>待機與低載運轉的能耗控制</a:t>
+              <a:t>永磁同步馬達（PMSM）比傳統感應馬達節能 20–30%，且啟動平穩、噪音低，已成高層住宅主流選配</a:t>
             </a:r>
           </a:p>
           <a:p>
             <a:pPr>
               <a:lnSpc>
-                <a:spcPct val="118000"/>
+                <a:spcPct val="115000"/>
               </a:lnSpc>
               <a:spcAft>
-                <a:spcPts val="500"/>
+                <a:spcPts val="400"/>
               </a:spcAft>
             </a:pPr>
             <a:r>
-              <a:rPr sz="1250" b="0" i="0">
+              <a:rPr sz="1150" b="0" i="0">
                 <a:solidFill>
                   <a:srgbClr val="B45309"/>
                 </a:solidFill>
@@ -11464,7 +11853,7 @@
               <a:t>•  </a:t>
             </a:r>
             <a:r>
-              <a:rPr sz="1250" b="0" i="0">
+              <a:rPr sz="1150" b="0" i="0">
                 <a:solidFill>
                   <a:srgbClr val="44403C"/>
                 </a:solidFill>
@@ -11472,21 +11861,53 @@
                 <a:ea typeface="Microsoft JhengHei"/>
                 <a:cs typeface="Inter"/>
               </a:rPr>
-              <a:t>群控調度，減少空跑與等待</a:t>
-            </a:r>
-          </a:p>
-        </p:txBody>
-      </p:sp>
-      <p:sp>
-        <p:nvSpPr>
-          <p:cNvPr id="10" name="Rectangle 9"/>
+              <a:t>加裝再生制動模組，下行時的制動能量回饋電網，電梯整體耗電再減 20–40%</a:t>
+            </a:r>
+          </a:p>
+          <a:p>
+            <a:pPr>
+              <a:lnSpc>
+                <a:spcPct val="115000"/>
+              </a:lnSpc>
+              <a:spcAft>
+                <a:spcPts val="400"/>
+              </a:spcAft>
+            </a:pPr>
+            <a:r>
+              <a:rPr sz="1150" b="0" i="0">
+                <a:solidFill>
+                  <a:srgbClr val="B45309"/>
+                </a:solidFill>
+                <a:latin typeface="Inter"/>
+                <a:ea typeface="Microsoft JhengHei"/>
+                <a:cs typeface="Inter"/>
+              </a:rPr>
+              <a:t>•  </a:t>
+            </a:r>
+            <a:r>
+              <a:rPr sz="1150" b="0" i="0">
+                <a:solidFill>
+                  <a:srgbClr val="44403C"/>
+                </a:solidFill>
+                <a:latin typeface="Inter"/>
+                <a:ea typeface="Microsoft JhengHei"/>
+                <a:cs typeface="Inter"/>
+              </a:rPr>
+              <a:t>群控調度讓多部電梯協同派發，尖峰時段減少空跑，待機期間自動降轉速</a:t>
+            </a:r>
+          </a:p>
+        </p:txBody>
+      </p:sp>
+      <p:sp>
+        <p:nvSpPr>
+          <p:cNvPr id="12" name="Rectangle 11"/>
           <p:cNvSpPr/>
           <p:nvPr/>
         </p:nvSpPr>
         <p:spPr>
           <a:xfrm>
-            <a:off x="3657600" y="3538728"/>
-            <a:ext cx="25400" cy="868680"/>
+            <a:off x="3657600" y="4032504"/>
+            <a:ext cx="25400" cy="822960"/>
           </a:xfrm>
           <a:prstGeom prst="rect">
             <a:avLst/>
@@ -11523,14 +11944,14 @@
       </p:sp>
       <p:sp>
         <p:nvSpPr>
-          <p:cNvPr id="11" name="TextBox 10"/>
-          <p:cNvSpPr txBox="1"/>
-          <p:nvPr/>
-        </p:nvSpPr>
-        <p:spPr>
-          <a:xfrm>
-            <a:off x="3840480" y="3538728"/>
-            <a:ext cx="7223760" cy="914400"/>
+          <p:cNvPr id="13" name="TextBox 12"/>
+          <p:cNvSpPr txBox="1"/>
+          <p:nvPr/>
+        </p:nvSpPr>
+        <p:spPr>
+          <a:xfrm>
+            <a:off x="3840480" y="4032504"/>
+            <a:ext cx="7223760" cy="868680"/>
           </a:xfrm>
           <a:prstGeom prst="rect">
             <a:avLst/>
@@ -11549,7 +11970,7 @@
               </a:lnSpc>
             </a:pPr>
             <a:r>
-              <a:rPr sz="1200" b="0" i="1">
+              <a:rPr sz="1150" b="0" i="1">
                 <a:solidFill>
                   <a:srgbClr val="B45309"/>
                 </a:solidFill>
@@ -11557,7 +11978,7 @@
                 <a:ea typeface="Microsoft JhengHei"/>
                 <a:cs typeface="Inter"/>
               </a:rPr>
-              <a:t>電梯的效率住戶看不到，但每個月的公電費單看得到。</a:t>
+              <a:t>住戶不關心機房裡用哪種馬達，但每個月管委會的公電帳單，記得清清楚楚。</a:t>
             </a:r>
           </a:p>
         </p:txBody>
@@ -11851,7 +12272,7 @@
         <p:spPr>
           <a:xfrm>
             <a:off x="3657600" y="1600200"/>
-            <a:ext cx="7589520" cy="365760"/>
+            <a:ext cx="7589520" cy="384048"/>
           </a:xfrm>
           <a:prstGeom prst="rect">
             <a:avLst/>
@@ -11878,21 +12299,108 @@
                 <a:ea typeface="Microsoft JhengHei"/>
                 <a:cs typeface="Inter"/>
               </a:rPr>
-              <a:t>容易被忽略，卻全天候運轉</a:t>
-            </a:r>
-          </a:p>
-        </p:txBody>
-      </p:sp>
-      <p:sp>
-        <p:nvSpPr>
-          <p:cNvPr id="9" name="TextBox 8"/>
-          <p:cNvSpPr txBox="1"/>
-          <p:nvPr/>
-        </p:nvSpPr>
-        <p:spPr>
-          <a:xfrm>
-            <a:off x="3657600" y="2103120"/>
-            <a:ext cx="7589520" cy="2103120"/>
+              <a:t>▶ 公電 23%  全天候不停歇</a:t>
+            </a:r>
+          </a:p>
+        </p:txBody>
+      </p:sp>
+      <p:sp>
+        <p:nvSpPr>
+          <p:cNvPr id="9" name="Rectangle 8"/>
+          <p:cNvSpPr/>
+          <p:nvPr/>
+        </p:nvSpPr>
+        <p:spPr>
+          <a:xfrm>
+            <a:off x="3657600" y="2039112"/>
+            <a:ext cx="7589520" cy="329184"/>
+          </a:xfrm>
+          <a:prstGeom prst="rect">
+            <a:avLst/>
+          </a:prstGeom>
+          <a:solidFill>
+            <a:srgbClr val="FEF3C7"/>
+          </a:solidFill>
+          <a:ln w="9525">
+            <a:solidFill>
+              <a:srgbClr val="E7E5E4"/>
+            </a:solidFill>
+          </a:ln>
+          <a:effectLst/>
+        </p:spPr>
+        <p:style>
+          <a:lnRef idx="1">
+            <a:schemeClr val="accent1"/>
+          </a:lnRef>
+          <a:fillRef idx="3">
+            <a:schemeClr val="accent1"/>
+          </a:fillRef>
+          <a:effectRef idx="2">
+            <a:schemeClr val="accent1"/>
+          </a:effectRef>
+          <a:fontRef idx="minor">
+            <a:schemeClr val="lt1"/>
+          </a:fontRef>
+        </p:style>
+        <p:txBody>
+          <a:bodyPr rtlCol="0" anchor="ctr"/>
+          <a:lstStyle/>
+          <a:p>
+            <a:pPr algn="ctr"/>
+          </a:p>
+        </p:txBody>
+      </p:sp>
+      <p:sp>
+        <p:nvSpPr>
+          <p:cNvPr id="10" name="TextBox 9"/>
+          <p:cNvSpPr txBox="1"/>
+          <p:nvPr/>
+        </p:nvSpPr>
+        <p:spPr>
+          <a:xfrm>
+            <a:off x="3767328" y="2075688"/>
+            <a:ext cx="7406640" cy="292608"/>
+          </a:xfrm>
+          <a:prstGeom prst="rect">
+            <a:avLst/>
+          </a:prstGeom>
+          <a:noFill/>
+        </p:spPr>
+        <p:txBody>
+          <a:bodyPr wrap="square" anchor="t" lIns="0" rIns="0" tIns="0" bIns="0">
+            <a:spAutoFit/>
+          </a:bodyPr>
+          <a:lstStyle/>
+          <a:p>
+            <a:pPr algn="l">
+              <a:lnSpc>
+                <a:spcPct val="100000"/>
+              </a:lnSpc>
+            </a:pPr>
+            <a:r>
+              <a:rPr sz="850" b="0" i="0">
+                <a:solidFill>
+                  <a:srgbClr val="B45309"/>
+                </a:solidFill>
+                <a:latin typeface="Consolas"/>
+                <a:ea typeface="Microsoft JhengHei"/>
+                <a:cs typeface="Consolas"/>
+              </a:rPr>
+              <a:t>P (kW) = rho × g × Q × H ÷ eta   (rho=1000 kg/m³，H=揚程，eta=泵效率)</a:t>
+            </a:r>
+          </a:p>
+        </p:txBody>
+      </p:sp>
+      <p:sp>
+        <p:nvSpPr>
+          <p:cNvPr id="11" name="TextBox 10"/>
+          <p:cNvSpPr txBox="1"/>
+          <p:nvPr/>
+        </p:nvSpPr>
+        <p:spPr>
+          <a:xfrm>
+            <a:off x="3657600" y="2441448"/>
+            <a:ext cx="7589520" cy="2286000"/>
           </a:xfrm>
           <a:prstGeom prst="rect">
             <a:avLst/>
@@ -11907,14 +12415,14 @@
           <a:p>
             <a:pPr>
               <a:lnSpc>
-                <a:spcPct val="118000"/>
+                <a:spcPct val="115000"/>
               </a:lnSpc>
               <a:spcAft>
-                <a:spcPts val="500"/>
+                <a:spcPts val="400"/>
               </a:spcAft>
             </a:pPr>
             <a:r>
-              <a:rPr sz="1250" b="0" i="0">
+              <a:rPr sz="1150" b="0" i="0">
                 <a:solidFill>
                   <a:srgbClr val="B45309"/>
                 </a:solidFill>
@@ -11925,7 +12433,7 @@
               <a:t>•  </a:t>
             </a:r>
             <a:r>
-              <a:rPr sz="1250" b="0" i="0">
+              <a:rPr sz="1150" b="0" i="0">
                 <a:solidFill>
                   <a:srgbClr val="44403C"/>
                 </a:solidFill>
@@ -11933,20 +12441,20 @@
                 <a:ea typeface="Microsoft JhengHei"/>
                 <a:cs typeface="Inter"/>
               </a:rPr>
-              <a:t>給水加壓與屋頂水箱揚水</a:t>
+              <a:t>20 層住宅揚程約 75 m，設計流量 1.5 m³/min，定速泵額定功率約 26 kW，24 小時維持加壓</a:t>
             </a:r>
           </a:p>
           <a:p>
             <a:pPr>
               <a:lnSpc>
-                <a:spcPct val="118000"/>
+                <a:spcPct val="115000"/>
               </a:lnSpc>
               <a:spcAft>
-                <a:spcPts val="500"/>
+                <a:spcPts val="400"/>
               </a:spcAft>
             </a:pPr>
             <a:r>
-              <a:rPr sz="1250" b="0" i="0">
+              <a:rPr sz="1150" b="0" i="0">
                 <a:solidFill>
                   <a:srgbClr val="B45309"/>
                 </a:solidFill>
@@ -11957,7 +12465,7 @@
               <a:t>•  </a:t>
             </a:r>
             <a:r>
-              <a:rPr sz="1250" b="0" i="0">
+              <a:rPr sz="1150" b="0" i="0">
                 <a:solidFill>
                   <a:srgbClr val="44403C"/>
                 </a:solidFill>
@@ -11965,20 +12473,20 @@
                 <a:ea typeface="Microsoft JhengHei"/>
                 <a:cs typeface="Inter"/>
               </a:rPr>
-              <a:t>變頻泵與分區減壓設計</a:t>
+              <a:t>改用變頻泵（VFD）後，依即時用水量自動調轉速；夜間流量不到尖峰的兩成，省電幅度可達 30–50%</a:t>
             </a:r>
           </a:p>
           <a:p>
             <a:pPr>
               <a:lnSpc>
-                <a:spcPct val="118000"/>
+                <a:spcPct val="115000"/>
               </a:lnSpc>
               <a:spcAft>
-                <a:spcPts val="500"/>
+                <a:spcPts val="400"/>
               </a:spcAft>
             </a:pPr>
             <a:r>
-              <a:rPr sz="1250" b="0" i="0">
+              <a:rPr sz="1150" b="0" i="0">
                 <a:solidFill>
                   <a:srgbClr val="B45309"/>
                 </a:solidFill>
@@ -11989,7 +12497,7 @@
               <a:t>•  </a:t>
             </a:r>
             <a:r>
-              <a:rPr sz="1250" b="0" i="0">
+              <a:rPr sz="1150" b="0" i="0">
                 <a:solidFill>
                   <a:srgbClr val="44403C"/>
                 </a:solidFill>
@@ -11997,21 +12505,53 @@
                 <a:ea typeface="Microsoft JhengHei"/>
                 <a:cs typeface="Inter"/>
               </a:rPr>
-              <a:t>馬達效率與管路損耗</a:t>
-            </a:r>
-          </a:p>
-        </p:txBody>
-      </p:sp>
-      <p:sp>
-        <p:nvSpPr>
-          <p:cNvPr id="10" name="Rectangle 9"/>
+              <a:t>手冊附錄列出揚水泵揚程基準值（PHc），依樓層數與用途查表評估是否符合能效門檻</a:t>
+            </a:r>
+          </a:p>
+          <a:p>
+            <a:pPr>
+              <a:lnSpc>
+                <a:spcPct val="115000"/>
+              </a:lnSpc>
+              <a:spcAft>
+                <a:spcPts val="400"/>
+              </a:spcAft>
+            </a:pPr>
+            <a:r>
+              <a:rPr sz="1150" b="0" i="0">
+                <a:solidFill>
+                  <a:srgbClr val="B45309"/>
+                </a:solidFill>
+                <a:latin typeface="Inter"/>
+                <a:ea typeface="Microsoft JhengHei"/>
+                <a:cs typeface="Inter"/>
+              </a:rPr>
+              <a:t>•  </a:t>
+            </a:r>
+            <a:r>
+              <a:rPr sz="1150" b="0" i="0">
+                <a:solidFill>
+                  <a:srgbClr val="44403C"/>
+                </a:solidFill>
+                <a:latin typeface="Inter"/>
+                <a:ea typeface="Microsoft JhengHei"/>
+                <a:cs typeface="Inter"/>
+              </a:rPr>
+              <a:t>分區減壓設計（低樓層獨立加壓迴路）避免低層超壓損耗，管路壽命也因此延長</a:t>
+            </a:r>
+          </a:p>
+        </p:txBody>
+      </p:sp>
+      <p:sp>
+        <p:nvSpPr>
+          <p:cNvPr id="12" name="Rectangle 11"/>
           <p:cNvSpPr/>
           <p:nvPr/>
         </p:nvSpPr>
         <p:spPr>
           <a:xfrm>
-            <a:off x="3657600" y="3538728"/>
-            <a:ext cx="25400" cy="868680"/>
+            <a:off x="3657600" y="4032504"/>
+            <a:ext cx="25400" cy="822960"/>
           </a:xfrm>
           <a:prstGeom prst="rect">
             <a:avLst/>
@@ -12048,14 +12588,14 @@
       </p:sp>
       <p:sp>
         <p:nvSpPr>
-          <p:cNvPr id="11" name="TextBox 10"/>
-          <p:cNvSpPr txBox="1"/>
-          <p:nvPr/>
-        </p:nvSpPr>
-        <p:spPr>
-          <a:xfrm>
-            <a:off x="3840480" y="3538728"/>
-            <a:ext cx="7223760" cy="914400"/>
+          <p:cNvPr id="13" name="TextBox 12"/>
+          <p:cNvSpPr txBox="1"/>
+          <p:nvPr/>
+        </p:nvSpPr>
+        <p:spPr>
+          <a:xfrm>
+            <a:off x="3840480" y="4032504"/>
+            <a:ext cx="7223760" cy="868680"/>
           </a:xfrm>
           <a:prstGeom prst="rect">
             <a:avLst/>
@@ -12074,7 +12614,7 @@
               </a:lnSpc>
             </a:pPr>
             <a:r>
-              <a:rPr sz="1200" b="0" i="1">
+              <a:rPr sz="1150" b="0" i="1">
                 <a:solidFill>
                   <a:srgbClr val="B45309"/>
                 </a:solidFill>
@@ -12082,7 +12622,7 @@
                 <a:ea typeface="Microsoft JhengHei"/>
                 <a:cs typeface="Inter"/>
               </a:rPr>
-              <a:t>揚水泵安靜地運轉一整年，是公電費單上常被忽略的一筆。</a:t>
+              <a:t>地下機房那台泵，住戶從來不知道它在哪 —— 但它每打一立方水都有成本，讓它打得聰明是值得的投資。</a:t>
             </a:r>
           </a:p>
         </p:txBody>
@@ -12376,7 +12916,7 @@
         <p:spPr>
           <a:xfrm>
             <a:off x="3657600" y="1600200"/>
-            <a:ext cx="7589520" cy="365760"/>
+            <a:ext cx="7589520" cy="384048"/>
           </a:xfrm>
           <a:prstGeom prst="rect">
             <a:avLst/>
@@ -12403,21 +12943,108 @@
                 <a:ea typeface="Microsoft JhengHei"/>
                 <a:cs typeface="Inter"/>
               </a:rPr>
-              <a:t>把剩下的公共機電都算進去</a:t>
-            </a:r>
-          </a:p>
-        </p:txBody>
-      </p:sp>
-      <p:sp>
-        <p:nvSpPr>
-          <p:cNvPr id="9" name="TextBox 8"/>
-          <p:cNvSpPr txBox="1"/>
-          <p:nvPr/>
-        </p:nvSpPr>
-        <p:spPr>
-          <a:xfrm>
-            <a:off x="3657600" y="2103120"/>
-            <a:ext cx="7589520" cy="2103120"/>
+              <a:t>停車場通風 16%，再加上熱水與其餘機電</a:t>
+            </a:r>
+          </a:p>
+        </p:txBody>
+      </p:sp>
+      <p:sp>
+        <p:nvSpPr>
+          <p:cNvPr id="9" name="Rectangle 8"/>
+          <p:cNvSpPr/>
+          <p:nvPr/>
+        </p:nvSpPr>
+        <p:spPr>
+          <a:xfrm>
+            <a:off x="3657600" y="2039112"/>
+            <a:ext cx="7589520" cy="329184"/>
+          </a:xfrm>
+          <a:prstGeom prst="rect">
+            <a:avLst/>
+          </a:prstGeom>
+          <a:solidFill>
+            <a:srgbClr val="FEF3C7"/>
+          </a:solidFill>
+          <a:ln w="9525">
+            <a:solidFill>
+              <a:srgbClr val="E7E5E4"/>
+            </a:solidFill>
+          </a:ln>
+          <a:effectLst/>
+        </p:spPr>
+        <p:style>
+          <a:lnRef idx="1">
+            <a:schemeClr val="accent1"/>
+          </a:lnRef>
+          <a:fillRef idx="3">
+            <a:schemeClr val="accent1"/>
+          </a:fillRef>
+          <a:effectRef idx="2">
+            <a:schemeClr val="accent1"/>
+          </a:effectRef>
+          <a:fontRef idx="minor">
+            <a:schemeClr val="lt1"/>
+          </a:fontRef>
+        </p:style>
+        <p:txBody>
+          <a:bodyPr rtlCol="0" anchor="ctr"/>
+          <a:lstStyle/>
+          <a:p>
+            <a:pPr algn="ctr"/>
+          </a:p>
+        </p:txBody>
+      </p:sp>
+      <p:sp>
+        <p:nvSpPr>
+          <p:cNvPr id="10" name="TextBox 9"/>
+          <p:cNvSpPr txBox="1"/>
+          <p:nvPr/>
+        </p:nvSpPr>
+        <p:spPr>
+          <a:xfrm>
+            <a:off x="3767328" y="2075688"/>
+            <a:ext cx="7406640" cy="292608"/>
+          </a:xfrm>
+          <a:prstGeom prst="rect">
+            <a:avLst/>
+          </a:prstGeom>
+          <a:noFill/>
+        </p:spPr>
+        <p:txBody>
+          <a:bodyPr wrap="square" anchor="t" lIns="0" rIns="0" tIns="0" bIns="0">
+            <a:spAutoFit/>
+          </a:bodyPr>
+          <a:lstStyle/>
+          <a:p>
+            <a:pPr algn="l">
+              <a:lnSpc>
+                <a:spcPct val="100000"/>
+              </a:lnSpc>
+            </a:pPr>
+            <a:r>
+              <a:rPr sz="850" b="0" i="0">
+                <a:solidFill>
+                  <a:srgbClr val="B45309"/>
+                </a:solidFill>
+                <a:latin typeface="Consolas"/>
+                <a:ea typeface="Microsoft JhengHei"/>
+                <a:cs typeface="Consolas"/>
+              </a:rPr>
+              <a:t>風機耗電 = 風量 (m³/h) × 靜壓 (Pa) ÷ (風機效率 × 3600) × 年運轉時數</a:t>
+            </a:r>
+          </a:p>
+        </p:txBody>
+      </p:sp>
+      <p:sp>
+        <p:nvSpPr>
+          <p:cNvPr id="11" name="TextBox 10"/>
+          <p:cNvSpPr txBox="1"/>
+          <p:nvPr/>
+        </p:nvSpPr>
+        <p:spPr>
+          <a:xfrm>
+            <a:off x="3657600" y="2441448"/>
+            <a:ext cx="7589520" cy="2286000"/>
           </a:xfrm>
           <a:prstGeom prst="rect">
             <a:avLst/>
@@ -12432,14 +13059,14 @@
           <a:p>
             <a:pPr>
               <a:lnSpc>
-                <a:spcPct val="118000"/>
+                <a:spcPct val="115000"/>
               </a:lnSpc>
               <a:spcAft>
-                <a:spcPts val="500"/>
+                <a:spcPts val="400"/>
               </a:spcAft>
             </a:pPr>
             <a:r>
-              <a:rPr sz="1250" b="0" i="0">
+              <a:rPr sz="1150" b="0" i="0">
                 <a:solidFill>
                   <a:srgbClr val="B45309"/>
                 </a:solidFill>
@@ -12450,7 +13077,7 @@
               <a:t>•  </a:t>
             </a:r>
             <a:r>
-              <a:rPr sz="1250" b="0" i="0">
+              <a:rPr sz="1150" b="0" i="0">
                 <a:solidFill>
                   <a:srgbClr val="44403C"/>
                 </a:solidFill>
@@ -12458,20 +13085,20 @@
                 <a:ea typeface="Microsoft JhengHei"/>
                 <a:cs typeface="Inter"/>
               </a:rPr>
-              <a:t>地下停車場通風與排風機</a:t>
+              <a:t>地下停車場通風佔公電 16%；加裝 CO 感應器後，風機從定速全轉改為按需啟停，實測耗電降幅可達 40–70%</a:t>
             </a:r>
           </a:p>
           <a:p>
             <a:pPr>
               <a:lnSpc>
-                <a:spcPct val="118000"/>
+                <a:spcPct val="115000"/>
               </a:lnSpc>
               <a:spcAft>
-                <a:spcPts val="500"/>
+                <a:spcPts val="400"/>
               </a:spcAft>
             </a:pPr>
             <a:r>
-              <a:rPr sz="1250" b="0" i="0">
+              <a:rPr sz="1150" b="0" i="0">
                 <a:solidFill>
                   <a:srgbClr val="B45309"/>
                 </a:solidFill>
@@ -12482,7 +13109,7 @@
               <a:t>•  </a:t>
             </a:r>
             <a:r>
-              <a:rPr sz="1250" b="0" i="0">
+              <a:rPr sz="1150" b="0" i="0">
                 <a:solidFill>
                   <a:srgbClr val="44403C"/>
                 </a:solidFill>
@@ -12490,20 +13117,20 @@
                 <a:ea typeface="Microsoft JhengHei"/>
                 <a:cs typeface="Inter"/>
               </a:rPr>
-              <a:t>公共空間的熱水系統</a:t>
+              <a:t>熱水系統：以熱泵熱水器取代傳統電熱棒，COP 從 1.0 提升至 3.5 以上，同等熱水量少用 65% 的電力</a:t>
             </a:r>
           </a:p>
           <a:p>
             <a:pPr>
               <a:lnSpc>
-                <a:spcPct val="118000"/>
+                <a:spcPct val="115000"/>
               </a:lnSpc>
               <a:spcAft>
-                <a:spcPts val="500"/>
+                <a:spcPts val="400"/>
               </a:spcAft>
             </a:pPr>
             <a:r>
-              <a:rPr sz="1250" b="0" i="0">
+              <a:rPr sz="1150" b="0" i="0">
                 <a:solidFill>
                   <a:srgbClr val="B45309"/>
                 </a:solidFill>
@@ -12514,7 +13141,7 @@
               <a:t>•  </a:t>
             </a:r>
             <a:r>
-              <a:rPr sz="1250" b="0" i="0">
+              <a:rPr sz="1150" b="0" i="0">
                 <a:solidFill>
                   <a:srgbClr val="44403C"/>
                 </a:solidFill>
@@ -12522,21 +13149,21 @@
                 <a:ea typeface="Microsoft JhengHei"/>
                 <a:cs typeface="Inter"/>
               </a:rPr>
-              <a:t>消防、給排水等其餘固定設備</a:t>
-            </a:r>
-          </a:p>
-        </p:txBody>
-      </p:sp>
-      <p:sp>
-        <p:nvSpPr>
-          <p:cNvPr id="10" name="Rectangle 9"/>
+              <a:t>手冊以公共耗電基準值 PEc 涵蓋此類設備，評估後換算成能效得分 SCOREEE，納入整體分級計算</a:t>
+            </a:r>
+          </a:p>
+        </p:txBody>
+      </p:sp>
+      <p:sp>
+        <p:nvSpPr>
+          <p:cNvPr id="12" name="Rectangle 11"/>
           <p:cNvSpPr/>
           <p:nvPr/>
         </p:nvSpPr>
         <p:spPr>
           <a:xfrm>
-            <a:off x="3657600" y="3538728"/>
-            <a:ext cx="25400" cy="868680"/>
+            <a:off x="3657600" y="3685032"/>
+            <a:ext cx="25400" cy="822960"/>
           </a:xfrm>
           <a:prstGeom prst="rect">
             <a:avLst/>
@@ -12573,14 +13200,14 @@
       </p:sp>
       <p:sp>
         <p:nvSpPr>
-          <p:cNvPr id="11" name="TextBox 10"/>
-          <p:cNvSpPr txBox="1"/>
-          <p:nvPr/>
-        </p:nvSpPr>
-        <p:spPr>
-          <a:xfrm>
-            <a:off x="3840480" y="3538728"/>
-            <a:ext cx="7223760" cy="914400"/>
+          <p:cNvPr id="13" name="TextBox 12"/>
+          <p:cNvSpPr txBox="1"/>
+          <p:nvPr/>
+        </p:nvSpPr>
+        <p:spPr>
+          <a:xfrm>
+            <a:off x="3840480" y="3685032"/>
+            <a:ext cx="7223760" cy="868680"/>
           </a:xfrm>
           <a:prstGeom prst="rect">
             <a:avLst/>
@@ -12599,7 +13226,7 @@
               </a:lnSpc>
             </a:pPr>
             <a:r>
-              <a:rPr sz="1200" b="0" i="1">
+              <a:rPr sz="1150" b="0" i="1">
                 <a:solidFill>
                   <a:srgbClr val="B45309"/>
                 </a:solidFill>
@@ -12607,7 +13234,7 @@
                 <a:ea typeface="Microsoft JhengHei"/>
                 <a:cs typeface="Inter"/>
               </a:rPr>
-              <a:t>能效計算邊界把這些細節都納入，標示才貼近建築實際耗能的全貌。</a:t>
+              <a:t>CO 感應器的成本只需幾千元，但它決定了地下停車場風扇接下來二十年的運轉策略。</a:t>
             </a:r>
           </a:p>
         </p:txBody>
